--- a/neerlandais1/powerpoints/Module_23_Waar_denk_je_aan.pptx
+++ b/neerlandais1/powerpoints/Module_23_Waar_denk_je_aan.pptx
@@ -133,18 +133,18 @@
   <p:extLst>
     <p:ext uri="{521415D9-36F7-43E2-AB2F-B90AF26B5E84}">
       <p14:sectionLst xmlns:p14="http://schemas.microsoft.com/office/powerpoint/2010/main">
-        <p14:section name="Ouverture" id="{6c289ce8-8193-a923-b2b5-3843dbec490e}">
+        <p14:section name="Ouverture" id="{0cf15af2-fabf-7c47-5a5d-193b8e0a4348}">
           <p14:sldIdLst>
             <p14:sldId id="256"/>
           </p14:sldIdLst>
         </p14:section>
-        <p14:section name="Découvrir" id="{227524d8-aee7-bd60-7fce-83ad893233d5}">
+        <p14:section name="Découvrir" id="{6c1c7866-6260-dc81-08b7-27ef9e2ac71d}">
           <p14:sldIdLst>
             <p14:sldId id="257"/>
             <p14:sldId id="258"/>
           </p14:sldIdLst>
         </p14:section>
-        <p14:section name="Comprendre" id="{47c645a9-248c-1704-94b2-13c675b6cc5a}">
+        <p14:section name="Comprendre" id="{1925834e-ea5a-358e-6948-eb6fad31171d}">
           <p14:sldIdLst>
             <p14:sldId id="259"/>
             <p14:sldId id="260"/>
@@ -158,7 +158,7 @@
             <p14:sldId id="268"/>
           </p14:sldIdLst>
         </p14:section>
-        <p14:section name="JIJ NU ! — Oefeningen" id="{b74f1b50-3f47-86af-683a-208f872cd73a}">
+        <p14:section name="JIJ NU ! — Oefeningen" id="{f89e0ff3-2598-39cd-15d9-06ba2d2db936}">
           <p14:sldIdLst>
             <p14:sldId id="269"/>
             <p14:sldId id="270"/>
@@ -175,7 +175,7 @@
             <p14:sldId id="281"/>
           </p14:sldIdLst>
         </p14:section>
-        <p14:section name="Clôture" id="{c9756c09-c023-3f82-5fac-6e0fbb333668}">
+        <p14:section name="Clôture" id="{968217ee-381e-56bb-6f2e-d0649658a5a9}">
           <p14:sldIdLst>
             <p14:sldId id="282"/>
           </p14:sldIdLst>
@@ -3806,7 +3806,7 @@
                   <a:srgbClr val="FFFFFF"/>
                 </a:solidFill>
               </a:rPr>
-              <a:t>MODULE 23 / 24</a:t>
+              <a:t>MODULE 23 / 29</a:t>
             </a:r>
             <a:endParaRPr lang="en-US" sz="1400" dirty="0"/>
           </a:p>

--- a/neerlandais1/powerpoints/Module_23_Waar_denk_je_aan.pptx
+++ b/neerlandais1/powerpoints/Module_23_Waar_denk_je_aan.pptx
@@ -133,18 +133,18 @@
   <p:extLst>
     <p:ext uri="{521415D9-36F7-43E2-AB2F-B90AF26B5E84}">
       <p14:sectionLst xmlns:p14="http://schemas.microsoft.com/office/powerpoint/2010/main">
-        <p14:section name="Ouverture" id="{0cf15af2-fabf-7c47-5a5d-193b8e0a4348}">
+        <p14:section name="Ouverture" id="{464bb947-34b7-2d38-cf05-45df50f60ce9}">
           <p14:sldIdLst>
             <p14:sldId id="256"/>
           </p14:sldIdLst>
         </p14:section>
-        <p14:section name="Découvrir" id="{6c1c7866-6260-dc81-08b7-27ef9e2ac71d}">
+        <p14:section name="Découvrir" id="{db12dda7-b3de-54d9-f649-7e75e29dd63f}">
           <p14:sldIdLst>
             <p14:sldId id="257"/>
             <p14:sldId id="258"/>
           </p14:sldIdLst>
         </p14:section>
-        <p14:section name="Comprendre" id="{1925834e-ea5a-358e-6948-eb6fad31171d}">
+        <p14:section name="Comprendre" id="{07b7b8b7-e61e-2116-e438-fca24ef3a82a}">
           <p14:sldIdLst>
             <p14:sldId id="259"/>
             <p14:sldId id="260"/>
@@ -158,7 +158,7 @@
             <p14:sldId id="268"/>
           </p14:sldIdLst>
         </p14:section>
-        <p14:section name="JIJ NU ! — Oefeningen" id="{f89e0ff3-2598-39cd-15d9-06ba2d2db936}">
+        <p14:section name="JIJ NU ! — Oefeningen" id="{aa4803db-3e5a-212f-f061-f161ef7f8ab4}">
           <p14:sldIdLst>
             <p14:sldId id="269"/>
             <p14:sldId id="270"/>
@@ -175,7 +175,7 @@
             <p14:sldId id="281"/>
           </p14:sldIdLst>
         </p14:section>
-        <p14:section name="Clôture" id="{968217ee-381e-56bb-6f2e-d0649658a5a9}">
+        <p14:section name="Clôture" id="{b355a762-ade3-9990-39a8-1ccff6e3aa8b}">
           <p14:sldIdLst>
             <p14:sldId id="282"/>
           </p14:sldIdLst>
@@ -3806,7 +3806,7 @@
                   <a:srgbClr val="FFFFFF"/>
                 </a:solidFill>
               </a:rPr>
-              <a:t>MODULE 23 / 29</a:t>
+              <a:t>MODULE 23 / 32</a:t>
             </a:r>
             <a:endParaRPr lang="en-US" sz="1400" dirty="0"/>
           </a:p>

--- a/neerlandais1/powerpoints/Module_23_Waar_denk_je_aan.pptx
+++ b/neerlandais1/powerpoints/Module_23_Waar_denk_je_aan.pptx
@@ -133,18 +133,18 @@
   <p:extLst>
     <p:ext uri="{521415D9-36F7-43E2-AB2F-B90AF26B5E84}">
       <p14:sectionLst xmlns:p14="http://schemas.microsoft.com/office/powerpoint/2010/main">
-        <p14:section name="Ouverture" id="{464bb947-34b7-2d38-cf05-45df50f60ce9}">
+        <p14:section name="Ouverture" id="{24f22fb1-d282-aa6e-44b3-4adfc8348516}">
           <p14:sldIdLst>
             <p14:sldId id="256"/>
           </p14:sldIdLst>
         </p14:section>
-        <p14:section name="Découvrir" id="{db12dda7-b3de-54d9-f649-7e75e29dd63f}">
+        <p14:section name="Découvrir" id="{5b72fbbe-91e7-a81b-2989-02e1797a912c}">
           <p14:sldIdLst>
             <p14:sldId id="257"/>
             <p14:sldId id="258"/>
           </p14:sldIdLst>
         </p14:section>
-        <p14:section name="Comprendre" id="{07b7b8b7-e61e-2116-e438-fca24ef3a82a}">
+        <p14:section name="Comprendre" id="{eb7f9530-6726-0d2d-9c1f-794d95048158}">
           <p14:sldIdLst>
             <p14:sldId id="259"/>
             <p14:sldId id="260"/>
@@ -158,7 +158,7 @@
             <p14:sldId id="268"/>
           </p14:sldIdLst>
         </p14:section>
-        <p14:section name="JIJ NU ! — Oefeningen" id="{aa4803db-3e5a-212f-f061-f161ef7f8ab4}">
+        <p14:section name="JIJ NU ! — Oefeningen" id="{31c4d20f-5d1e-ad45-2052-e6dd62e46ace}">
           <p14:sldIdLst>
             <p14:sldId id="269"/>
             <p14:sldId id="270"/>
@@ -175,7 +175,7 @@
             <p14:sldId id="281"/>
           </p14:sldIdLst>
         </p14:section>
-        <p14:section name="Clôture" id="{b355a762-ade3-9990-39a8-1ccff6e3aa8b}">
+        <p14:section name="Clôture" id="{c619939a-8455-c4a1-84b7-2210b2d30cb7}">
           <p14:sldIdLst>
             <p14:sldId id="282"/>
           </p14:sldIdLst>

--- a/neerlandais1/powerpoints/Module_23_Waar_denk_je_aan.pptx
+++ b/neerlandais1/powerpoints/Module_23_Waar_denk_je_aan.pptx
@@ -133,18 +133,18 @@
   <p:extLst>
     <p:ext uri="{521415D9-36F7-43E2-AB2F-B90AF26B5E84}">
       <p14:sectionLst xmlns:p14="http://schemas.microsoft.com/office/powerpoint/2010/main">
-        <p14:section name="Ouverture" id="{24f22fb1-d282-aa6e-44b3-4adfc8348516}">
+        <p14:section name="Ouverture" id="{4c69eb82-17a9-300d-30fe-9a8bea59e53d}">
           <p14:sldIdLst>
             <p14:sldId id="256"/>
           </p14:sldIdLst>
         </p14:section>
-        <p14:section name="Découvrir" id="{5b72fbbe-91e7-a81b-2989-02e1797a912c}">
+        <p14:section name="Découvrir" id="{84365d48-295b-ca15-f848-91b56616d348}">
           <p14:sldIdLst>
             <p14:sldId id="257"/>
             <p14:sldId id="258"/>
           </p14:sldIdLst>
         </p14:section>
-        <p14:section name="Comprendre" id="{eb7f9530-6726-0d2d-9c1f-794d95048158}">
+        <p14:section name="Comprendre" id="{4fd966e4-0baf-0fd2-4c51-bd3f84b08e38}">
           <p14:sldIdLst>
             <p14:sldId id="259"/>
             <p14:sldId id="260"/>
@@ -158,7 +158,7 @@
             <p14:sldId id="268"/>
           </p14:sldIdLst>
         </p14:section>
-        <p14:section name="JIJ NU ! — Oefeningen" id="{31c4d20f-5d1e-ad45-2052-e6dd62e46ace}">
+        <p14:section name="JIJ NU ! — Oefeningen" id="{943402d1-41c1-59a2-9bcb-34881f56a9f3}">
           <p14:sldIdLst>
             <p14:sldId id="269"/>
             <p14:sldId id="270"/>
@@ -175,7 +175,7 @@
             <p14:sldId id="281"/>
           </p14:sldIdLst>
         </p14:section>
-        <p14:section name="Clôture" id="{c619939a-8455-c4a1-84b7-2210b2d30cb7}">
+        <p14:section name="Clôture" id="{00c24266-ca51-a54b-b35b-83de2acf13af}">
           <p14:sldIdLst>
             <p14:sldId id="282"/>
           </p14:sldIdLst>

--- a/neerlandais1/powerpoints/Module_23_Waar_denk_je_aan.pptx
+++ b/neerlandais1/powerpoints/Module_23_Waar_denk_je_aan.pptx
@@ -133,18 +133,18 @@
   <p:extLst>
     <p:ext uri="{521415D9-36F7-43E2-AB2F-B90AF26B5E84}">
       <p14:sectionLst xmlns:p14="http://schemas.microsoft.com/office/powerpoint/2010/main">
-        <p14:section name="Ouverture" id="{4c69eb82-17a9-300d-30fe-9a8bea59e53d}">
+        <p14:section name="Ouverture" id="{f2ea4b14-5c81-07bb-8fa5-15089502f90a}">
           <p14:sldIdLst>
             <p14:sldId id="256"/>
           </p14:sldIdLst>
         </p14:section>
-        <p14:section name="Découvrir" id="{84365d48-295b-ca15-f848-91b56616d348}">
+        <p14:section name="Découvrir" id="{8cd8027e-b8f8-63e1-cb34-c5e53aea4e1c}">
           <p14:sldIdLst>
             <p14:sldId id="257"/>
             <p14:sldId id="258"/>
           </p14:sldIdLst>
         </p14:section>
-        <p14:section name="Comprendre" id="{4fd966e4-0baf-0fd2-4c51-bd3f84b08e38}">
+        <p14:section name="Comprendre" id="{b2b4d1c5-7048-f7f8-afc3-9a20cf9570f3}">
           <p14:sldIdLst>
             <p14:sldId id="259"/>
             <p14:sldId id="260"/>
@@ -158,7 +158,7 @@
             <p14:sldId id="268"/>
           </p14:sldIdLst>
         </p14:section>
-        <p14:section name="JIJ NU ! — Oefeningen" id="{943402d1-41c1-59a2-9bcb-34881f56a9f3}">
+        <p14:section name="JIJ NU ! — Oefeningen" id="{ab69040a-9c6c-ed33-507e-7be4d92ceafd}">
           <p14:sldIdLst>
             <p14:sldId id="269"/>
             <p14:sldId id="270"/>
@@ -175,7 +175,7 @@
             <p14:sldId id="281"/>
           </p14:sldIdLst>
         </p14:section>
-        <p14:section name="Clôture" id="{00c24266-ca51-a54b-b35b-83de2acf13af}">
+        <p14:section name="Clôture" id="{d98e55fe-6681-349a-0a0c-7610a432afbf}">
           <p14:sldIdLst>
             <p14:sldId id="282"/>
           </p14:sldIdLst>

--- a/neerlandais1/powerpoints/Module_23_Waar_denk_je_aan.pptx
+++ b/neerlandais1/powerpoints/Module_23_Waar_denk_je_aan.pptx
@@ -133,18 +133,18 @@
   <p:extLst>
     <p:ext uri="{521415D9-36F7-43E2-AB2F-B90AF26B5E84}">
       <p14:sectionLst xmlns:p14="http://schemas.microsoft.com/office/powerpoint/2010/main">
-        <p14:section name="Ouverture" id="{f2ea4b14-5c81-07bb-8fa5-15089502f90a}">
+        <p14:section name="Ouverture" id="{be3b202f-c2f8-36c7-d98d-8a85c20a31f5}">
           <p14:sldIdLst>
             <p14:sldId id="256"/>
           </p14:sldIdLst>
         </p14:section>
-        <p14:section name="Découvrir" id="{8cd8027e-b8f8-63e1-cb34-c5e53aea4e1c}">
+        <p14:section name="Découvrir" id="{c0106726-f6f3-9d2c-bf25-3bb9b3ffb508}">
           <p14:sldIdLst>
             <p14:sldId id="257"/>
             <p14:sldId id="258"/>
           </p14:sldIdLst>
         </p14:section>
-        <p14:section name="Comprendre" id="{b2b4d1c5-7048-f7f8-afc3-9a20cf9570f3}">
+        <p14:section name="Comprendre" id="{8d9821a1-e9a0-bb1d-9975-e5b3eb6b90fd}">
           <p14:sldIdLst>
             <p14:sldId id="259"/>
             <p14:sldId id="260"/>
@@ -158,7 +158,7 @@
             <p14:sldId id="268"/>
           </p14:sldIdLst>
         </p14:section>
-        <p14:section name="JIJ NU ! — Oefeningen" id="{ab69040a-9c6c-ed33-507e-7be4d92ceafd}">
+        <p14:section name="JIJ NU ! — Oefeningen" id="{84a9da15-715d-e17b-7903-e4b5d3ec625b}">
           <p14:sldIdLst>
             <p14:sldId id="269"/>
             <p14:sldId id="270"/>
@@ -175,7 +175,7 @@
             <p14:sldId id="281"/>
           </p14:sldIdLst>
         </p14:section>
-        <p14:section name="Clôture" id="{d98e55fe-6681-349a-0a0c-7610a432afbf}">
+        <p14:section name="Clôture" id="{b0c0a4f8-c859-203f-141e-36b400310d78}">
           <p14:sldIdLst>
             <p14:sldId id="282"/>
           </p14:sldIdLst>

--- a/neerlandais1/powerpoints/Module_23_Waar_denk_je_aan.pptx
+++ b/neerlandais1/powerpoints/Module_23_Waar_denk_je_aan.pptx
@@ -133,18 +133,18 @@
   <p:extLst>
     <p:ext uri="{521415D9-36F7-43E2-AB2F-B90AF26B5E84}">
       <p14:sectionLst xmlns:p14="http://schemas.microsoft.com/office/powerpoint/2010/main">
-        <p14:section name="Ouverture" id="{be3b202f-c2f8-36c7-d98d-8a85c20a31f5}">
+        <p14:section name="Ouverture" id="{eda006e9-f95c-d3b6-5166-ca1d4984a982}">
           <p14:sldIdLst>
             <p14:sldId id="256"/>
           </p14:sldIdLst>
         </p14:section>
-        <p14:section name="Découvrir" id="{c0106726-f6f3-9d2c-bf25-3bb9b3ffb508}">
+        <p14:section name="Découvrir" id="{3c607e68-120d-3cdd-f152-2890a5f04f0a}">
           <p14:sldIdLst>
             <p14:sldId id="257"/>
             <p14:sldId id="258"/>
           </p14:sldIdLst>
         </p14:section>
-        <p14:section name="Comprendre" id="{8d9821a1-e9a0-bb1d-9975-e5b3eb6b90fd}">
+        <p14:section name="Comprendre" id="{5b916619-36bf-fafd-2e29-db33a8a7092b}">
           <p14:sldIdLst>
             <p14:sldId id="259"/>
             <p14:sldId id="260"/>
@@ -158,7 +158,7 @@
             <p14:sldId id="268"/>
           </p14:sldIdLst>
         </p14:section>
-        <p14:section name="JIJ NU ! — Oefeningen" id="{84a9da15-715d-e17b-7903-e4b5d3ec625b}">
+        <p14:section name="JIJ NU ! — Oefeningen" id="{e04c4792-98c2-b73b-01bf-fd6db7e81c56}">
           <p14:sldIdLst>
             <p14:sldId id="269"/>
             <p14:sldId id="270"/>
@@ -175,7 +175,7 @@
             <p14:sldId id="281"/>
           </p14:sldIdLst>
         </p14:section>
-        <p14:section name="Clôture" id="{b0c0a4f8-c859-203f-141e-36b400310d78}">
+        <p14:section name="Clôture" id="{f8ca4b9a-8902-968f-df24-bc5e0372ff38}">
           <p14:sldIdLst>
             <p14:sldId id="282"/>
           </p14:sldIdLst>

--- a/neerlandais1/powerpoints/Module_23_Waar_denk_je_aan.pptx
+++ b/neerlandais1/powerpoints/Module_23_Waar_denk_je_aan.pptx
@@ -133,18 +133,18 @@
   <p:extLst>
     <p:ext uri="{521415D9-36F7-43E2-AB2F-B90AF26B5E84}">
       <p14:sectionLst xmlns:p14="http://schemas.microsoft.com/office/powerpoint/2010/main">
-        <p14:section name="Ouverture" id="{eda006e9-f95c-d3b6-5166-ca1d4984a982}">
+        <p14:section name="Ouverture" id="{af867de0-4878-b9ff-32a6-c7032b8f8018}">
           <p14:sldIdLst>
             <p14:sldId id="256"/>
           </p14:sldIdLst>
         </p14:section>
-        <p14:section name="Découvrir" id="{3c607e68-120d-3cdd-f152-2890a5f04f0a}">
+        <p14:section name="Découvrir" id="{fbfef5c2-1de7-c2a7-5ece-cb8ceb76d4bd}">
           <p14:sldIdLst>
             <p14:sldId id="257"/>
             <p14:sldId id="258"/>
           </p14:sldIdLst>
         </p14:section>
-        <p14:section name="Comprendre" id="{5b916619-36bf-fafd-2e29-db33a8a7092b}">
+        <p14:section name="Comprendre" id="{12fce974-c87e-d817-fceb-133c5b6bdcb0}">
           <p14:sldIdLst>
             <p14:sldId id="259"/>
             <p14:sldId id="260"/>
@@ -158,7 +158,7 @@
             <p14:sldId id="268"/>
           </p14:sldIdLst>
         </p14:section>
-        <p14:section name="JIJ NU ! — Oefeningen" id="{e04c4792-98c2-b73b-01bf-fd6db7e81c56}">
+        <p14:section name="JIJ NU ! — Oefeningen" id="{af280f59-dc60-c810-d2b6-dfc46f10d552}">
           <p14:sldIdLst>
             <p14:sldId id="269"/>
             <p14:sldId id="270"/>
@@ -175,7 +175,7 @@
             <p14:sldId id="281"/>
           </p14:sldIdLst>
         </p14:section>
-        <p14:section name="Clôture" id="{f8ca4b9a-8902-968f-df24-bc5e0372ff38}">
+        <p14:section name="Clôture" id="{41d48b88-c3f4-42e6-645f-0b1681a2f8f0}">
           <p14:sldIdLst>
             <p14:sldId id="282"/>
           </p14:sldIdLst>

--- a/neerlandais1/powerpoints/Module_23_Waar_denk_je_aan.pptx
+++ b/neerlandais1/powerpoints/Module_23_Waar_denk_je_aan.pptx
@@ -133,18 +133,18 @@
   <p:extLst>
     <p:ext uri="{521415D9-36F7-43E2-AB2F-B90AF26B5E84}">
       <p14:sectionLst xmlns:p14="http://schemas.microsoft.com/office/powerpoint/2010/main">
-        <p14:section name="Ouverture" id="{af867de0-4878-b9ff-32a6-c7032b8f8018}">
+        <p14:section name="Ouverture" id="{31815e4e-6e98-bc73-fec1-23cd4d5e12bd}">
           <p14:sldIdLst>
             <p14:sldId id="256"/>
           </p14:sldIdLst>
         </p14:section>
-        <p14:section name="Découvrir" id="{fbfef5c2-1de7-c2a7-5ece-cb8ceb76d4bd}">
+        <p14:section name="Découvrir" id="{3497e398-a078-3da8-687d-4c52b85e8f35}">
           <p14:sldIdLst>
             <p14:sldId id="257"/>
             <p14:sldId id="258"/>
           </p14:sldIdLst>
         </p14:section>
-        <p14:section name="Comprendre" id="{12fce974-c87e-d817-fceb-133c5b6bdcb0}">
+        <p14:section name="Comprendre" id="{70da6b9a-9ad4-79c5-bbb9-6477c53641e4}">
           <p14:sldIdLst>
             <p14:sldId id="259"/>
             <p14:sldId id="260"/>
@@ -158,7 +158,7 @@
             <p14:sldId id="268"/>
           </p14:sldIdLst>
         </p14:section>
-        <p14:section name="JIJ NU ! — Oefeningen" id="{af280f59-dc60-c810-d2b6-dfc46f10d552}">
+        <p14:section name="JIJ NU ! — Oefeningen" id="{7e148ff8-1246-10ad-dad5-daef91a27743}">
           <p14:sldIdLst>
             <p14:sldId id="269"/>
             <p14:sldId id="270"/>
@@ -175,7 +175,7 @@
             <p14:sldId id="281"/>
           </p14:sldIdLst>
         </p14:section>
-        <p14:section name="Clôture" id="{41d48b88-c3f4-42e6-645f-0b1681a2f8f0}">
+        <p14:section name="Clôture" id="{319eaa0e-87e0-bc96-ba29-fe62678337d8}">
           <p14:sldIdLst>
             <p14:sldId id="282"/>
           </p14:sldIdLst>

--- a/neerlandais1/powerpoints/Module_23_Waar_denk_je_aan.pptx
+++ b/neerlandais1/powerpoints/Module_23_Waar_denk_je_aan.pptx
@@ -133,18 +133,18 @@
   <p:extLst>
     <p:ext uri="{521415D9-36F7-43E2-AB2F-B90AF26B5E84}">
       <p14:sectionLst xmlns:p14="http://schemas.microsoft.com/office/powerpoint/2010/main">
-        <p14:section name="Ouverture" id="{31815e4e-6e98-bc73-fec1-23cd4d5e12bd}">
+        <p14:section name="Ouverture" id="{bdd4e3ad-a26c-bf91-eac9-3ff59ec8da15}">
           <p14:sldIdLst>
             <p14:sldId id="256"/>
           </p14:sldIdLst>
         </p14:section>
-        <p14:section name="Découvrir" id="{3497e398-a078-3da8-687d-4c52b85e8f35}">
+        <p14:section name="Découvrir" id="{f1647871-6afa-c8bc-2497-b42607cd54f8}">
           <p14:sldIdLst>
             <p14:sldId id="257"/>
             <p14:sldId id="258"/>
           </p14:sldIdLst>
         </p14:section>
-        <p14:section name="Comprendre" id="{70da6b9a-9ad4-79c5-bbb9-6477c53641e4}">
+        <p14:section name="Comprendre" id="{8e65bf24-b047-abdb-7be1-77e41ffa919b}">
           <p14:sldIdLst>
             <p14:sldId id="259"/>
             <p14:sldId id="260"/>
@@ -158,7 +158,7 @@
             <p14:sldId id="268"/>
           </p14:sldIdLst>
         </p14:section>
-        <p14:section name="JIJ NU ! — Oefeningen" id="{7e148ff8-1246-10ad-dad5-daef91a27743}">
+        <p14:section name="JIJ NU ! — Oefeningen" id="{9a444e0a-c933-071a-689d-9ac61b629c8f}">
           <p14:sldIdLst>
             <p14:sldId id="269"/>
             <p14:sldId id="270"/>
@@ -175,7 +175,7 @@
             <p14:sldId id="281"/>
           </p14:sldIdLst>
         </p14:section>
-        <p14:section name="Clôture" id="{319eaa0e-87e0-bc96-ba29-fe62678337d8}">
+        <p14:section name="Clôture" id="{694226a7-e9cd-e2cb-54d5-b98ba1161cea}">
           <p14:sldIdLst>
             <p14:sldId id="282"/>
           </p14:sldIdLst>
